--- a/ProjectQuiz/quiz-tournament/Documentation/HTMLCSSJSamarth.pptx
+++ b/ProjectQuiz/quiz-tournament/Documentation/HTMLCSSJSamarth.pptx
@@ -6077,11 +6077,14 @@
         </p:spPr>
         <p:txBody>
           <a:bodyPr anchorCtr="0" anchor="t" bIns="91425" lIns="91425" spcFirstLastPara="1" rIns="91425" wrap="square" tIns="91425">
-            <a:normAutofit/>
+            <a:normAutofit lnSpcReduction="10000"/>
           </a:bodyPr>
           <a:lstStyle/>
           <a:p>
             <a:pPr indent="0" lvl="0" marL="0" rtl="0" algn="ctr">
+              <a:lnSpc>
+                <a:spcPct val="115000"/>
+              </a:lnSpc>
               <a:spcBef>
                 <a:spcPts val="0"/>
               </a:spcBef>
@@ -6096,7 +6099,7 @@
                   <a:schemeClr val="lt1"/>
                 </a:solidFill>
               </a:rPr>
-              <a:t>Project title</a:t>
+              <a:t>Online Quiz Tournament Platform</a:t>
             </a:r>
             <a:endParaRPr b="1">
               <a:solidFill>
@@ -6128,7 +6131,7 @@
                   <a:schemeClr val="lt1"/>
                 </a:solidFill>
               </a:rPr>
-              <a:t>y Stduent Name/Group Name</a:t>
+              <a:t>y Samarth Navale</a:t>
             </a:r>
             <a:endParaRPr b="1" sz="832">
               <a:solidFill>
